--- a/@Materi Kuliah/Materi_Pembelajaran_Mesin/Presentasi_Pembelajaran_Mesin_Profesional_dari_HTML.pptx
+++ b/@Materi Kuliah/Materi_Pembelajaran_Mesin/Presentasi_Pembelajaran_Mesin_Profesional_dari_HTML.pptx
@@ -2,131 +2,36 @@
 <file path=ppt/presentation.xml><?xml version="1.0" encoding="utf-8"?>
 <p:presentation xmlns:p="http://schemas.openxmlformats.org/presentationml/2006/main">
   <p:sldMasterIdLst>
-    <p:sldMasterId xmlns:r="http://schemas.openxmlformats.org/officeDocument/2006/relationships" id="2147483648" r:id="R2d5bf3beb6ba42de"/>
+    <p:sldMasterId xmlns:r="http://schemas.openxmlformats.org/officeDocument/2006/relationships" id="2147483648" r:id="R000df4fce4d44041"/>
   </p:sldMasterIdLst>
   <p:notesMasterIdLst>
-    <p:notesMasterId xmlns:r="http://schemas.openxmlformats.org/officeDocument/2006/relationships" r:id="Rde8057da92014d9c"/>
+    <p:notesMasterId xmlns:r="http://schemas.openxmlformats.org/officeDocument/2006/relationships" r:id="Rff78ce3724ee426c"/>
   </p:notesMasterIdLst>
   <p:sldIdLst>
-    <p:sldId xmlns:r="http://schemas.openxmlformats.org/officeDocument/2006/relationships" id="256" r:id="Rd8ef17f8a44b4a2b"/>
-    <p:sldId xmlns:r="http://schemas.openxmlformats.org/officeDocument/2006/relationships" id="257" r:id="Rd9fcf1be2138425f"/>
-    <p:sldId xmlns:r="http://schemas.openxmlformats.org/officeDocument/2006/relationships" id="258" r:id="R3a8e32a54cf44b48"/>
-    <p:sldId xmlns:r="http://schemas.openxmlformats.org/officeDocument/2006/relationships" id="259" r:id="R161830d4e3d84e26"/>
-    <p:sldId xmlns:r="http://schemas.openxmlformats.org/officeDocument/2006/relationships" id="260" r:id="Rc31e3d49d11f44cd"/>
-    <p:sldId xmlns:r="http://schemas.openxmlformats.org/officeDocument/2006/relationships" id="261" r:id="Ra26c1cc9b9af4f5a"/>
-    <p:sldId xmlns:r="http://schemas.openxmlformats.org/officeDocument/2006/relationships" id="262" r:id="R82ab7dd32920494c"/>
-    <p:sldId xmlns:r="http://schemas.openxmlformats.org/officeDocument/2006/relationships" id="263" r:id="Re07f941114fb49ca"/>
-    <p:sldId xmlns:r="http://schemas.openxmlformats.org/officeDocument/2006/relationships" id="264" r:id="R07d69adca67947ed"/>
-    <p:sldId xmlns:r="http://schemas.openxmlformats.org/officeDocument/2006/relationships" id="265" r:id="R6f78c23c2f7741a9"/>
-    <p:sldId xmlns:r="http://schemas.openxmlformats.org/officeDocument/2006/relationships" id="266" r:id="Rca94017c9a8a44c2"/>
-    <p:sldId xmlns:r="http://schemas.openxmlformats.org/officeDocument/2006/relationships" id="267" r:id="Rc3dafed660c04521"/>
-    <p:sldId xmlns:r="http://schemas.openxmlformats.org/officeDocument/2006/relationships" id="268" r:id="R4090937c354945e6"/>
-    <p:sldId xmlns:r="http://schemas.openxmlformats.org/officeDocument/2006/relationships" id="269" r:id="Rf2b211e75bea4fba"/>
-    <p:sldId xmlns:r="http://schemas.openxmlformats.org/officeDocument/2006/relationships" id="270" r:id="Rdbc6088297094467"/>
-    <p:sldId xmlns:r="http://schemas.openxmlformats.org/officeDocument/2006/relationships" id="271" r:id="R9d58612b3e844856"/>
-    <p:sldId xmlns:r="http://schemas.openxmlformats.org/officeDocument/2006/relationships" id="272" r:id="Rbd865ab76fe64c81"/>
-    <p:sldId xmlns:r="http://schemas.openxmlformats.org/officeDocument/2006/relationships" id="273" r:id="R0b90731e3d2f4cc4"/>
-    <p:sldId xmlns:r="http://schemas.openxmlformats.org/officeDocument/2006/relationships" id="274" r:id="R364bae1aa12d4de3"/>
-    <p:sldId xmlns:r="http://schemas.openxmlformats.org/officeDocument/2006/relationships" id="275" r:id="Rbdbcbab332a844c6"/>
-    <p:sldId xmlns:r="http://schemas.openxmlformats.org/officeDocument/2006/relationships" id="276" r:id="Rc6fe6e3594874df9"/>
+    <p:sldId xmlns:r="http://schemas.openxmlformats.org/officeDocument/2006/relationships" id="256" r:id="R2c7f1359a4284511"/>
+    <p:sldId xmlns:r="http://schemas.openxmlformats.org/officeDocument/2006/relationships" id="257" r:id="R96416986a77642c3"/>
+    <p:sldId xmlns:r="http://schemas.openxmlformats.org/officeDocument/2006/relationships" id="258" r:id="Rdf1fb55f576b4a7f"/>
+    <p:sldId xmlns:r="http://schemas.openxmlformats.org/officeDocument/2006/relationships" id="259" r:id="Rbd8b29a50ab14cd5"/>
+    <p:sldId xmlns:r="http://schemas.openxmlformats.org/officeDocument/2006/relationships" id="260" r:id="R658fa7f3a56c4d56"/>
+    <p:sldId xmlns:r="http://schemas.openxmlformats.org/officeDocument/2006/relationships" id="261" r:id="Ra651e5158cfa4b64"/>
+    <p:sldId xmlns:r="http://schemas.openxmlformats.org/officeDocument/2006/relationships" id="262" r:id="R1047fa4e3a6d4420"/>
+    <p:sldId xmlns:r="http://schemas.openxmlformats.org/officeDocument/2006/relationships" id="263" r:id="R9349e780e4fe4412"/>
+    <p:sldId xmlns:r="http://schemas.openxmlformats.org/officeDocument/2006/relationships" id="264" r:id="R2a350d49e0714220"/>
+    <p:sldId xmlns:r="http://schemas.openxmlformats.org/officeDocument/2006/relationships" id="265" r:id="R34af39a3faab4a51"/>
+    <p:sldId xmlns:r="http://schemas.openxmlformats.org/officeDocument/2006/relationships" id="266" r:id="R5c3fee3db345418c"/>
+    <p:sldId xmlns:r="http://schemas.openxmlformats.org/officeDocument/2006/relationships" id="267" r:id="Rc25f53e218404624"/>
+    <p:sldId xmlns:r="http://schemas.openxmlformats.org/officeDocument/2006/relationships" id="268" r:id="R6b6c88d3d8e2405e"/>
+    <p:sldId xmlns:r="http://schemas.openxmlformats.org/officeDocument/2006/relationships" id="269" r:id="R14cf9ececb034ad8"/>
+    <p:sldId xmlns:r="http://schemas.openxmlformats.org/officeDocument/2006/relationships" id="270" r:id="R67a128e5bae34cf0"/>
+    <p:sldId xmlns:r="http://schemas.openxmlformats.org/officeDocument/2006/relationships" id="271" r:id="R8ca8b6500eb64a68"/>
+    <p:sldId xmlns:r="http://schemas.openxmlformats.org/officeDocument/2006/relationships" id="272" r:id="Rf8fe743780074b2a"/>
+    <p:sldId xmlns:r="http://schemas.openxmlformats.org/officeDocument/2006/relationships" id="273" r:id="R8ae20bebd610439b"/>
+    <p:sldId xmlns:r="http://schemas.openxmlformats.org/officeDocument/2006/relationships" id="274" r:id="R1407e562d6584edc"/>
+    <p:sldId xmlns:r="http://schemas.openxmlformats.org/officeDocument/2006/relationships" id="275" r:id="R18bc74bc3e5f4dab"/>
+    <p:sldId xmlns:r="http://schemas.openxmlformats.org/officeDocument/2006/relationships" id="276" r:id="R9568d370f6bc4bb5"/>
   </p:sldIdLst>
   <p:sldSz cx="12192000" cy="6858000"/>
   <p:notesSz cx="6858000" cy="9144000"/>
-  <p:defaultTextStyle>
-    <a:defPPr xmlns:a="http://schemas.openxmlformats.org/drawingml/2006/main">
-      <a:defRPr lang="en-US"/>
-    </a:defPPr>
-    <a:lvl1pPr xmlns:a="http://schemas.openxmlformats.org/drawingml/2006/main" marL="0" indent="0" algn="l" defTabSz="914400">
-      <a:defRPr sz="1800" kern="1200">
-        <a:solidFill>
-          <a:schemeClr val="tx1"/>
-        </a:solidFill>
-        <a:latin typeface="+mn-lt"/>
-        <a:ea typeface="+mn-ea"/>
-        <a:cs typeface="+mn-cs"/>
-      </a:defRPr>
-    </a:lvl1pPr>
-    <a:lvl2pPr xmlns:a="http://schemas.openxmlformats.org/drawingml/2006/main" marL="457200" indent="0" algn="l" defTabSz="914400">
-      <a:defRPr sz="1800" kern="1200">
-        <a:solidFill>
-          <a:schemeClr val="tx1"/>
-        </a:solidFill>
-        <a:latin typeface="+mn-lt"/>
-        <a:ea typeface="+mn-ea"/>
-        <a:cs typeface="+mn-cs"/>
-      </a:defRPr>
-    </a:lvl2pPr>
-    <a:lvl3pPr xmlns:a="http://schemas.openxmlformats.org/drawingml/2006/main" marL="914400" indent="0" algn="l" defTabSz="914400">
-      <a:defRPr sz="1800" kern="1200">
-        <a:solidFill>
-          <a:schemeClr val="tx1"/>
-        </a:solidFill>
-        <a:latin typeface="+mn-lt"/>
-        <a:ea typeface="+mn-ea"/>
-        <a:cs typeface="+mn-cs"/>
-      </a:defRPr>
-    </a:lvl3pPr>
-    <a:lvl4pPr xmlns:a="http://schemas.openxmlformats.org/drawingml/2006/main" marL="1371600" indent="0" algn="l" defTabSz="914400">
-      <a:defRPr sz="1800" kern="1200">
-        <a:solidFill>
-          <a:schemeClr val="tx1"/>
-        </a:solidFill>
-        <a:latin typeface="+mn-lt"/>
-        <a:ea typeface="+mn-ea"/>
-        <a:cs typeface="+mn-cs"/>
-      </a:defRPr>
-    </a:lvl4pPr>
-    <a:lvl5pPr xmlns:a="http://schemas.openxmlformats.org/drawingml/2006/main" marL="1828800" indent="0" algn="l" defTabSz="914400">
-      <a:defRPr sz="1800" kern="1200">
-        <a:solidFill>
-          <a:schemeClr val="tx1"/>
-        </a:solidFill>
-        <a:latin typeface="+mn-lt"/>
-        <a:ea typeface="+mn-ea"/>
-        <a:cs typeface="+mn-cs"/>
-      </a:defRPr>
-    </a:lvl5pPr>
-    <a:lvl6pPr xmlns:a="http://schemas.openxmlformats.org/drawingml/2006/main" marL="2286000" indent="0" algn="l" defTabSz="914400">
-      <a:defRPr sz="1800" kern="1200">
-        <a:solidFill>
-          <a:schemeClr val="tx1"/>
-        </a:solidFill>
-        <a:latin typeface="+mn-lt"/>
-        <a:ea typeface="+mn-ea"/>
-        <a:cs typeface="+mn-cs"/>
-      </a:defRPr>
-    </a:lvl6pPr>
-    <a:lvl7pPr xmlns:a="http://schemas.openxmlformats.org/drawingml/2006/main" marL="2743200" indent="0" algn="l" defTabSz="914400">
-      <a:defRPr sz="1800" kern="1200">
-        <a:solidFill>
-          <a:schemeClr val="tx1"/>
-        </a:solidFill>
-        <a:latin typeface="+mn-lt"/>
-        <a:ea typeface="+mn-ea"/>
-        <a:cs typeface="+mn-cs"/>
-      </a:defRPr>
-    </a:lvl7pPr>
-    <a:lvl8pPr xmlns:a="http://schemas.openxmlformats.org/drawingml/2006/main" marL="3200400" indent="0" algn="l" defTabSz="914400">
-      <a:defRPr sz="1800" kern="1200">
-        <a:solidFill>
-          <a:schemeClr val="tx1"/>
-        </a:solidFill>
-        <a:latin typeface="+mn-lt"/>
-        <a:ea typeface="+mn-ea"/>
-        <a:cs typeface="+mn-cs"/>
-      </a:defRPr>
-    </a:lvl8pPr>
-    <a:lvl9pPr xmlns:a="http://schemas.openxmlformats.org/drawingml/2006/main" marL="3657600" indent="0" algn="l" defTabSz="914400">
-      <a:defRPr sz="1800" kern="1200">
-        <a:solidFill>
-          <a:schemeClr val="tx1"/>
-        </a:solidFill>
-        <a:latin typeface="+mn-lt"/>
-        <a:ea typeface="+mn-ea"/>
-        <a:cs typeface="+mn-cs"/>
-      </a:defRPr>
-    </a:lvl9pPr>
-  </p:defaultTextStyle>
 </p:presentation>
 </file>
 
@@ -1453,7 +1358,26 @@
         <p:txBody>
           <a:bodyPr xmlns:a="http://schemas.openxmlformats.org/drawingml/2006/main"/>
           <a:lstStyle xmlns:a="http://schemas.openxmlformats.org/drawingml/2006/main"/>
-          <a:p xmlns:a="http://schemas.openxmlformats.org/drawingml/2006/main"/>
+          <a:p xmlns:a="http://schemas.openxmlformats.org/drawingml/2006/main">
+            <a:r>
+              <a:t>[Sources]</a:t>
+            </a:r>
+          </a:p>
+          <a:p xmlns:a="http://schemas.openxmlformats.org/drawingml/2006/main">
+            <a:r>
+              <a:t>- RPS mata kuliah Revisi AI 2026, Program Studi S2 Statistika Terapan FMIPA Universitas Padjadjaran.</a:t>
+            </a:r>
+          </a:p>
+          <a:p xmlns:a="http://schemas.openxmlformats.org/drawingml/2006/main">
+            <a:r>
+              <a:t>[/Sources]</a:t>
+            </a:r>
+          </a:p>
+          <a:p xmlns:a="http://schemas.openxmlformats.org/drawingml/2006/main">
+            <a:r>
+              <a:t>Penutup: CPL tetap. AI adalah akselerator ketercapaian CPMK/Sub-CPMK, bukan pengganti penalaran statistika. Tekankan kewajiban prompt log ringkas, sumber, kode/notebook reproducible, validasi, dan audit trail.</a:t>
+            </a:r>
+          </a:p>
         </p:txBody>
       </p:sp>
       <p:sp>
@@ -2010,8 +1934,8 @@
   </p:cSld>
   <p:clrMap bg1="lt1" tx1="dk1" bg2="lt2" tx2="dk2" accent1="accent1" accent2="accent2" accent3="accent3" accent4="accent4" accent5="accent5" accent6="accent6" hlink="hlink" folHlink="folHlink"/>
   <p:sldLayoutIdLst>
-    <p:sldLayoutId xmlns:r="http://schemas.openxmlformats.org/officeDocument/2006/relationships" id="2147483649" r:id="Rdfb480b1d75c4bbd"/>
-    <p:sldLayoutId xmlns:r="http://schemas.openxmlformats.org/officeDocument/2006/relationships" id="2147483650" r:id="R846a5d27b9334b53"/>
+    <p:sldLayoutId xmlns:r="http://schemas.openxmlformats.org/officeDocument/2006/relationships" id="2147483649" r:id="R8419dcee343842d5"/>
+    <p:sldLayoutId xmlns:r="http://schemas.openxmlformats.org/officeDocument/2006/relationships" id="2147483650" r:id="Rcdeb9ab9ebc645ce"/>
   </p:sldLayoutIdLst>
   <p:hf sldNum="0" hdr="0" ftr="0" dt="0"/>
   <p:txStyles>
@@ -2577,7 +2501,7 @@
           <p:nvPr/>
         </p:nvPicPr>
         <p:blipFill>
-          <a:blip xmlns:r="http://schemas.openxmlformats.org/officeDocument/2006/relationships" xmlns:a="http://schemas.openxmlformats.org/drawingml/2006/main" r:embed="Rcb5f621273604e00"/>
+          <a:blip xmlns:r="http://schemas.openxmlformats.org/officeDocument/2006/relationships" xmlns:a="http://schemas.openxmlformats.org/drawingml/2006/main" r:embed="R01f15f61436d46f1"/>
           <a:stretch xmlns:a="http://schemas.openxmlformats.org/drawingml/2006/main">
             <a:fillRect l="0" t="0" r="0" b="0"/>
           </a:stretch>
@@ -2723,7 +2647,7 @@
           <p:nvPr/>
         </p:nvPicPr>
         <p:blipFill>
-          <a:blip xmlns:r="http://schemas.openxmlformats.org/officeDocument/2006/relationships" xmlns:a="http://schemas.openxmlformats.org/drawingml/2006/main" r:embed="R63fafe64fc134d41"/>
+          <a:blip xmlns:r="http://schemas.openxmlformats.org/officeDocument/2006/relationships" xmlns:a="http://schemas.openxmlformats.org/drawingml/2006/main" r:embed="R002aea37bf4e4743"/>
           <a:stretch xmlns:a="http://schemas.openxmlformats.org/drawingml/2006/main">
             <a:fillRect l="0" t="0" r="0" b="0"/>
           </a:stretch>
@@ -3329,7 +3253,7 @@
           <p:nvPr/>
         </p:nvPicPr>
         <p:blipFill>
-          <a:blip xmlns:r="http://schemas.openxmlformats.org/officeDocument/2006/relationships" xmlns:a="http://schemas.openxmlformats.org/drawingml/2006/main" r:embed="Rda8d0c33b4e34c10"/>
+          <a:blip xmlns:r="http://schemas.openxmlformats.org/officeDocument/2006/relationships" xmlns:a="http://schemas.openxmlformats.org/drawingml/2006/main" r:embed="R31e032c4871846b8"/>
           <a:stretch xmlns:a="http://schemas.openxmlformats.org/drawingml/2006/main">
             <a:fillRect l="0" t="0" r="0" b="0"/>
           </a:stretch>
@@ -5479,7 +5403,7 @@
           <p:nvPr/>
         </p:nvPicPr>
         <p:blipFill>
-          <a:blip xmlns:r="http://schemas.openxmlformats.org/officeDocument/2006/relationships" xmlns:a="http://schemas.openxmlformats.org/drawingml/2006/main" r:embed="Rc28968d35a7d4752"/>
+          <a:blip xmlns:r="http://schemas.openxmlformats.org/officeDocument/2006/relationships" xmlns:a="http://schemas.openxmlformats.org/drawingml/2006/main" r:embed="Rae2a120e4d2941bf"/>
           <a:stretch xmlns:a="http://schemas.openxmlformats.org/drawingml/2006/main">
             <a:fillRect l="0" t="0" r="0" b="0"/>
           </a:stretch>
@@ -5758,7 +5682,7 @@
           <p:nvPr/>
         </p:nvPicPr>
         <p:blipFill>
-          <a:blip xmlns:r="http://schemas.openxmlformats.org/officeDocument/2006/relationships" xmlns:a="http://schemas.openxmlformats.org/drawingml/2006/main" r:embed="R5cfbda9c4a814397"/>
+          <a:blip xmlns:r="http://schemas.openxmlformats.org/officeDocument/2006/relationships" xmlns:a="http://schemas.openxmlformats.org/drawingml/2006/main" r:embed="R611462d93cc84b70"/>
           <a:stretch xmlns:a="http://schemas.openxmlformats.org/drawingml/2006/main">
             <a:fillRect l="0" t="0" r="0" b="0"/>
           </a:stretch>
@@ -7292,7 +7216,7 @@
           <p:nvPr/>
         </p:nvPicPr>
         <p:blipFill>
-          <a:blip xmlns:r="http://schemas.openxmlformats.org/officeDocument/2006/relationships" xmlns:a="http://schemas.openxmlformats.org/drawingml/2006/main" r:embed="R2a48a8ed3d414555"/>
+          <a:blip xmlns:r="http://schemas.openxmlformats.org/officeDocument/2006/relationships" xmlns:a="http://schemas.openxmlformats.org/drawingml/2006/main" r:embed="R27c9286bb8c34a88"/>
           <a:stretch xmlns:a="http://schemas.openxmlformats.org/drawingml/2006/main">
             <a:fillRect l="0" t="0" r="0" b="0"/>
           </a:stretch>
@@ -8461,7 +8385,7 @@
           <p:nvPr/>
         </p:nvPicPr>
         <p:blipFill>
-          <a:blip xmlns:r="http://schemas.openxmlformats.org/officeDocument/2006/relationships" xmlns:a="http://schemas.openxmlformats.org/drawingml/2006/main" r:embed="R2d8b5f86ab6d411b"/>
+          <a:blip xmlns:r="http://schemas.openxmlformats.org/officeDocument/2006/relationships" xmlns:a="http://schemas.openxmlformats.org/drawingml/2006/main" r:embed="R39e06152ac8b4a1c"/>
           <a:stretch xmlns:a="http://schemas.openxmlformats.org/drawingml/2006/main">
             <a:fillRect l="0" t="0" r="0" b="0"/>
           </a:stretch>
@@ -9688,7 +9612,7 @@
           <p:nvPr/>
         </p:nvPicPr>
         <p:blipFill>
-          <a:blip xmlns:r="http://schemas.openxmlformats.org/officeDocument/2006/relationships" xmlns:a="http://schemas.openxmlformats.org/drawingml/2006/main" r:embed="R1a0dc228a041467d"/>
+          <a:blip xmlns:r="http://schemas.openxmlformats.org/officeDocument/2006/relationships" xmlns:a="http://schemas.openxmlformats.org/drawingml/2006/main" r:embed="Rd7d694c3afa0427a"/>
           <a:stretch xmlns:a="http://schemas.openxmlformats.org/drawingml/2006/main">
             <a:fillRect l="0" t="0" r="0" b="0"/>
           </a:stretch>
@@ -10893,7 +10817,7 @@
           <p:nvPr/>
         </p:nvPicPr>
         <p:blipFill>
-          <a:blip xmlns:r="http://schemas.openxmlformats.org/officeDocument/2006/relationships" xmlns:a="http://schemas.openxmlformats.org/drawingml/2006/main" r:embed="R3504f456bec44bba"/>
+          <a:blip xmlns:r="http://schemas.openxmlformats.org/officeDocument/2006/relationships" xmlns:a="http://schemas.openxmlformats.org/drawingml/2006/main" r:embed="R1431391b1f5e4797"/>
           <a:stretch xmlns:a="http://schemas.openxmlformats.org/drawingml/2006/main">
             <a:fillRect l="0" t="0" r="0" b="0"/>
           </a:stretch>
@@ -11172,7 +11096,7 @@
           <p:nvPr/>
         </p:nvPicPr>
         <p:blipFill>
-          <a:blip xmlns:r="http://schemas.openxmlformats.org/officeDocument/2006/relationships" xmlns:a="http://schemas.openxmlformats.org/drawingml/2006/main" r:embed="R45d20939277d4932"/>
+          <a:blip xmlns:r="http://schemas.openxmlformats.org/officeDocument/2006/relationships" xmlns:a="http://schemas.openxmlformats.org/drawingml/2006/main" r:embed="R8bef402677f14c12"/>
           <a:stretch xmlns:a="http://schemas.openxmlformats.org/drawingml/2006/main">
             <a:fillRect l="0" t="0" r="0" b="0"/>
           </a:stretch>
@@ -12717,7 +12641,7 @@
           <p:nvPr/>
         </p:nvPicPr>
         <p:blipFill>
-          <a:blip xmlns:r="http://schemas.openxmlformats.org/officeDocument/2006/relationships" xmlns:a="http://schemas.openxmlformats.org/drawingml/2006/main" r:embed="R497cc1a7765f48ab"/>
+          <a:blip xmlns:r="http://schemas.openxmlformats.org/officeDocument/2006/relationships" xmlns:a="http://schemas.openxmlformats.org/drawingml/2006/main" r:embed="R69a955c2f43347e3"/>
           <a:stretch xmlns:a="http://schemas.openxmlformats.org/drawingml/2006/main">
             <a:fillRect l="0" t="0" r="0" b="0"/>
           </a:stretch>
@@ -14734,7 +14658,7 @@
           <p:nvPr/>
         </p:nvPicPr>
         <p:blipFill>
-          <a:blip xmlns:r="http://schemas.openxmlformats.org/officeDocument/2006/relationships" xmlns:a="http://schemas.openxmlformats.org/drawingml/2006/main" r:embed="R67b9d5ad59614246"/>
+          <a:blip xmlns:r="http://schemas.openxmlformats.org/officeDocument/2006/relationships" xmlns:a="http://schemas.openxmlformats.org/drawingml/2006/main" r:embed="R6ceabacf26db4129"/>
           <a:stretch xmlns:a="http://schemas.openxmlformats.org/drawingml/2006/main">
             <a:fillRect l="0" t="0" r="0" b="0"/>
           </a:stretch>
@@ -15961,7 +15885,7 @@
           <p:nvPr/>
         </p:nvPicPr>
         <p:blipFill>
-          <a:blip xmlns:r="http://schemas.openxmlformats.org/officeDocument/2006/relationships" xmlns:a="http://schemas.openxmlformats.org/drawingml/2006/main" r:embed="R70e58c18d1704036"/>
+          <a:blip xmlns:r="http://schemas.openxmlformats.org/officeDocument/2006/relationships" xmlns:a="http://schemas.openxmlformats.org/drawingml/2006/main" r:embed="R4a9165f207694839"/>
           <a:stretch xmlns:a="http://schemas.openxmlformats.org/drawingml/2006/main">
             <a:fillRect l="0" t="0" r="0" b="0"/>
           </a:stretch>
@@ -17102,7 +17026,7 @@
           <p:nvPr/>
         </p:nvPicPr>
         <p:blipFill>
-          <a:blip xmlns:r="http://schemas.openxmlformats.org/officeDocument/2006/relationships" xmlns:a="http://schemas.openxmlformats.org/drawingml/2006/main" r:embed="R30cdc527291748af"/>
+          <a:blip xmlns:r="http://schemas.openxmlformats.org/officeDocument/2006/relationships" xmlns:a="http://schemas.openxmlformats.org/drawingml/2006/main" r:embed="R9ca6f26d0ea84bdd"/>
           <a:stretch xmlns:a="http://schemas.openxmlformats.org/drawingml/2006/main">
             <a:fillRect l="0" t="0" r="0" b="0"/>
           </a:stretch>
@@ -18567,7 +18491,7 @@
           <p:nvPr/>
         </p:nvPicPr>
         <p:blipFill>
-          <a:blip xmlns:r="http://schemas.openxmlformats.org/officeDocument/2006/relationships" xmlns:a="http://schemas.openxmlformats.org/drawingml/2006/main" r:embed="Re6d6356cc4e141ab"/>
+          <a:blip xmlns:r="http://schemas.openxmlformats.org/officeDocument/2006/relationships" xmlns:a="http://schemas.openxmlformats.org/drawingml/2006/main" r:embed="R0e61afd7bb3944c0"/>
           <a:stretch xmlns:a="http://schemas.openxmlformats.org/drawingml/2006/main">
             <a:fillRect l="0" t="0" r="0" b="0"/>
           </a:stretch>
@@ -18713,7 +18637,7 @@
           <p:nvPr/>
         </p:nvPicPr>
         <p:blipFill>
-          <a:blip xmlns:r="http://schemas.openxmlformats.org/officeDocument/2006/relationships" xmlns:a="http://schemas.openxmlformats.org/drawingml/2006/main" r:embed="Ra814ed0481544df7"/>
+          <a:blip xmlns:r="http://schemas.openxmlformats.org/officeDocument/2006/relationships" xmlns:a="http://schemas.openxmlformats.org/drawingml/2006/main" r:embed="R8aa4664813c544dd"/>
           <a:stretch xmlns:a="http://schemas.openxmlformats.org/drawingml/2006/main">
             <a:fillRect l="0" t="0" r="0" b="0"/>
           </a:stretch>
@@ -18817,7 +18741,7 @@
                 <a:ea typeface="Aptos Display"/>
                 <a:cs typeface="Aptos Display"/>
               </a:rPr>
-              <a:t>Dari data menuju</a:t>
+              <a:t>AI mempercepat proses,</a:t>
             </a:r>
           </a:p>
           <a:p xmlns:a="http://schemas.openxmlformats.org/drawingml/2006/main">
@@ -18833,7 +18757,7 @@
                 <a:ea typeface="Aptos Display"/>
                 <a:cs typeface="Aptos Display"/>
               </a:rPr>
-              <a:t>keputusan yang dapat diuji</a:t>
+              <a:t>penalaran tetap memimpin</a:t>
             </a:r>
           </a:p>
         </p:txBody>
@@ -18900,7 +18824,7 @@
         </p:spPr>
         <p:txBody>
           <a:bodyPr xmlns:a="http://schemas.openxmlformats.org/drawingml/2006/main" wrap="square" lIns="635" tIns="635" rIns="635" bIns="635" anchor="t">
-            <a:normAutofit fontScale="100000"/>
+            <a:normAutofit fontScale="93620"/>
           </a:bodyPr>
           <a:lstStyle xmlns:a="http://schemas.openxmlformats.org/drawingml/2006/main"/>
           <a:p xmlns:a="http://schemas.openxmlformats.org/drawingml/2006/main">
@@ -18916,7 +18840,7 @@
                 <a:ea typeface="Aptos"/>
                 <a:cs typeface="Aptos"/>
               </a:rPr>
-              <a:t>Pembelajaran Mesin menghubungkan teori, data, metode, validasi, dan komunikasi untuk menghasilkan keputusan yang sahih, dapat direplikasi, dan bertanggung jawab.</a:t>
+              <a:t>Pembelajaran Mesin memadukan teori, data, komputasi, validasi, dan komunikasi. AI mempercepat eksplorasi dan pemeriksaan awal; mahasiswa tetap memverifikasi asumsi, kode, hasil numerik, ketidakpastian, sumber, dan dampak sebelum mengambil keputusan.</a:t>
             </a:r>
           </a:p>
         </p:txBody>
@@ -19086,7 +19010,7 @@
           <p:nvPr/>
         </p:nvPicPr>
         <p:blipFill>
-          <a:blip xmlns:r="http://schemas.openxmlformats.org/officeDocument/2006/relationships" xmlns:a="http://schemas.openxmlformats.org/drawingml/2006/main" r:embed="R745cccf103ea4544"/>
+          <a:blip xmlns:r="http://schemas.openxmlformats.org/officeDocument/2006/relationships" xmlns:a="http://schemas.openxmlformats.org/drawingml/2006/main" r:embed="Rf94da404f86a4273"/>
           <a:stretch xmlns:a="http://schemas.openxmlformats.org/drawingml/2006/main">
             <a:fillRect l="0" t="0" r="0" b="0"/>
           </a:stretch>
@@ -20217,7 +20141,7 @@
           <p:nvPr/>
         </p:nvPicPr>
         <p:blipFill>
-          <a:blip xmlns:r="http://schemas.openxmlformats.org/officeDocument/2006/relationships" xmlns:a="http://schemas.openxmlformats.org/drawingml/2006/main" r:embed="R3b702f5f72cd49ab"/>
+          <a:blip xmlns:r="http://schemas.openxmlformats.org/officeDocument/2006/relationships" xmlns:a="http://schemas.openxmlformats.org/drawingml/2006/main" r:embed="R14a2cbf4372443b1"/>
           <a:stretch xmlns:a="http://schemas.openxmlformats.org/drawingml/2006/main">
             <a:fillRect l="0" t="0" r="0" b="0"/>
           </a:stretch>
@@ -22321,7 +22245,7 @@
           <p:nvPr/>
         </p:nvPicPr>
         <p:blipFill>
-          <a:blip xmlns:r="http://schemas.openxmlformats.org/officeDocument/2006/relationships" xmlns:a="http://schemas.openxmlformats.org/drawingml/2006/main" r:embed="R71db7bd1c3bb43f4"/>
+          <a:blip xmlns:r="http://schemas.openxmlformats.org/officeDocument/2006/relationships" xmlns:a="http://schemas.openxmlformats.org/drawingml/2006/main" r:embed="R07c9dda430204bcd"/>
           <a:stretch xmlns:a="http://schemas.openxmlformats.org/drawingml/2006/main">
             <a:fillRect l="0" t="0" r="0" b="0"/>
           </a:stretch>
@@ -23603,7 +23527,7 @@
           <p:nvPr/>
         </p:nvPicPr>
         <p:blipFill>
-          <a:blip xmlns:r="http://schemas.openxmlformats.org/officeDocument/2006/relationships" xmlns:a="http://schemas.openxmlformats.org/drawingml/2006/main" r:embed="R3bedb4f8c2284603"/>
+          <a:blip xmlns:r="http://schemas.openxmlformats.org/officeDocument/2006/relationships" xmlns:a="http://schemas.openxmlformats.org/drawingml/2006/main" r:embed="R8349951c0b9e49bf"/>
           <a:stretch xmlns:a="http://schemas.openxmlformats.org/drawingml/2006/main">
             <a:fillRect l="0" t="0" r="0" b="0"/>
           </a:stretch>
@@ -23882,7 +23806,7 @@
           <p:nvPr/>
         </p:nvPicPr>
         <p:blipFill>
-          <a:blip xmlns:r="http://schemas.openxmlformats.org/officeDocument/2006/relationships" xmlns:a="http://schemas.openxmlformats.org/drawingml/2006/main" r:embed="R8fd4f822b9434051"/>
+          <a:blip xmlns:r="http://schemas.openxmlformats.org/officeDocument/2006/relationships" xmlns:a="http://schemas.openxmlformats.org/drawingml/2006/main" r:embed="Rf45e41acedcd4446"/>
           <a:stretch xmlns:a="http://schemas.openxmlformats.org/drawingml/2006/main">
             <a:fillRect l="0" t="0" r="0" b="0"/>
           </a:stretch>
@@ -25962,7 +25886,7 @@
           <p:nvPr/>
         </p:nvPicPr>
         <p:blipFill>
-          <a:blip xmlns:r="http://schemas.openxmlformats.org/officeDocument/2006/relationships" xmlns:a="http://schemas.openxmlformats.org/drawingml/2006/main" r:embed="R0ba2c9122bdd498b"/>
+          <a:blip xmlns:r="http://schemas.openxmlformats.org/officeDocument/2006/relationships" xmlns:a="http://schemas.openxmlformats.org/drawingml/2006/main" r:embed="Rc2412b2a2596482c"/>
           <a:stretch xmlns:a="http://schemas.openxmlformats.org/drawingml/2006/main">
             <a:fillRect l="0" t="0" r="0" b="0"/>
           </a:stretch>
@@ -27375,7 +27299,7 @@
           <p:nvPr/>
         </p:nvPicPr>
         <p:blipFill>
-          <a:blip xmlns:r="http://schemas.openxmlformats.org/officeDocument/2006/relationships" xmlns:a="http://schemas.openxmlformats.org/drawingml/2006/main" r:embed="R365e9eb50e804f0d"/>
+          <a:blip xmlns:r="http://schemas.openxmlformats.org/officeDocument/2006/relationships" xmlns:a="http://schemas.openxmlformats.org/drawingml/2006/main" r:embed="R94f638bb917a4c83"/>
           <a:stretch xmlns:a="http://schemas.openxmlformats.org/drawingml/2006/main">
             <a:fillRect l="0" t="0" r="0" b="0"/>
           </a:stretch>
